--- a/Machine Learning - SmartManufacturing/Class 07 KMeans/KMeans.pptx
+++ b/Machine Learning - SmartManufacturing/Class 07 KMeans/KMeans.pptx
@@ -110,6 +110,11 @@
       </a:defRPr>
     </a:lvl9pPr>
   </p:defaultTextStyle>
+  <p:extLst>
+    <p:ext uri="{EFAFB233-063F-42B5-8137-9DF3F51BA10A}">
+      <p15:sldGuideLst xmlns:p15="http://schemas.microsoft.com/office/powerpoint/2012/main"/>
+    </p:ext>
+  </p:extLst>
 </p:presentation>
 </file>
 
@@ -260,7 +265,7 @@
           <a:p>
             <a:fld id="{8CBF1E60-7676-4F67-B9D0-C84594FFCE4F}" type="datetimeFigureOut">
               <a:rPr lang="en-US" smtClean="0"/>
-              <a:t>6/22/2025</a:t>
+              <a:t>8/12/2025</a:t>
             </a:fld>
             <a:endParaRPr lang="en-US"/>
           </a:p>
@@ -458,7 +463,7 @@
           <a:p>
             <a:fld id="{8CBF1E60-7676-4F67-B9D0-C84594FFCE4F}" type="datetimeFigureOut">
               <a:rPr lang="en-US" smtClean="0"/>
-              <a:t>6/22/2025</a:t>
+              <a:t>8/12/2025</a:t>
             </a:fld>
             <a:endParaRPr lang="en-US"/>
           </a:p>
@@ -666,7 +671,7 @@
           <a:p>
             <a:fld id="{8CBF1E60-7676-4F67-B9D0-C84594FFCE4F}" type="datetimeFigureOut">
               <a:rPr lang="en-US" smtClean="0"/>
-              <a:t>6/22/2025</a:t>
+              <a:t>8/12/2025</a:t>
             </a:fld>
             <a:endParaRPr lang="en-US"/>
           </a:p>
@@ -864,7 +869,7 @@
           <a:p>
             <a:fld id="{8CBF1E60-7676-4F67-B9D0-C84594FFCE4F}" type="datetimeFigureOut">
               <a:rPr lang="en-US" smtClean="0"/>
-              <a:t>6/22/2025</a:t>
+              <a:t>8/12/2025</a:t>
             </a:fld>
             <a:endParaRPr lang="en-US"/>
           </a:p>
@@ -1139,7 +1144,7 @@
           <a:p>
             <a:fld id="{8CBF1E60-7676-4F67-B9D0-C84594FFCE4F}" type="datetimeFigureOut">
               <a:rPr lang="en-US" smtClean="0"/>
-              <a:t>6/22/2025</a:t>
+              <a:t>8/12/2025</a:t>
             </a:fld>
             <a:endParaRPr lang="en-US"/>
           </a:p>
@@ -1404,7 +1409,7 @@
           <a:p>
             <a:fld id="{8CBF1E60-7676-4F67-B9D0-C84594FFCE4F}" type="datetimeFigureOut">
               <a:rPr lang="en-US" smtClean="0"/>
-              <a:t>6/22/2025</a:t>
+              <a:t>8/12/2025</a:t>
             </a:fld>
             <a:endParaRPr lang="en-US"/>
           </a:p>
@@ -1816,7 +1821,7 @@
           <a:p>
             <a:fld id="{8CBF1E60-7676-4F67-B9D0-C84594FFCE4F}" type="datetimeFigureOut">
               <a:rPr lang="en-US" smtClean="0"/>
-              <a:t>6/22/2025</a:t>
+              <a:t>8/12/2025</a:t>
             </a:fld>
             <a:endParaRPr lang="en-US"/>
           </a:p>
@@ -1957,7 +1962,7 @@
           <a:p>
             <a:fld id="{8CBF1E60-7676-4F67-B9D0-C84594FFCE4F}" type="datetimeFigureOut">
               <a:rPr lang="en-US" smtClean="0"/>
-              <a:t>6/22/2025</a:t>
+              <a:t>8/12/2025</a:t>
             </a:fld>
             <a:endParaRPr lang="en-US"/>
           </a:p>
@@ -2070,7 +2075,7 @@
           <a:p>
             <a:fld id="{8CBF1E60-7676-4F67-B9D0-C84594FFCE4F}" type="datetimeFigureOut">
               <a:rPr lang="en-US" smtClean="0"/>
-              <a:t>6/22/2025</a:t>
+              <a:t>8/12/2025</a:t>
             </a:fld>
             <a:endParaRPr lang="en-US"/>
           </a:p>
@@ -2381,7 +2386,7 @@
           <a:p>
             <a:fld id="{8CBF1E60-7676-4F67-B9D0-C84594FFCE4F}" type="datetimeFigureOut">
               <a:rPr lang="en-US" smtClean="0"/>
-              <a:t>6/22/2025</a:t>
+              <a:t>8/12/2025</a:t>
             </a:fld>
             <a:endParaRPr lang="en-US"/>
           </a:p>
@@ -2669,7 +2674,7 @@
           <a:p>
             <a:fld id="{8CBF1E60-7676-4F67-B9D0-C84594FFCE4F}" type="datetimeFigureOut">
               <a:rPr lang="en-US" smtClean="0"/>
-              <a:t>6/22/2025</a:t>
+              <a:t>8/12/2025</a:t>
             </a:fld>
             <a:endParaRPr lang="en-US"/>
           </a:p>
@@ -2910,7 +2915,7 @@
           <a:p>
             <a:fld id="{8CBF1E60-7676-4F67-B9D0-C84594FFCE4F}" type="datetimeFigureOut">
               <a:rPr lang="en-US" smtClean="0"/>
-              <a:t>6/22/2025</a:t>
+              <a:t>8/12/2025</a:t>
             </a:fld>
             <a:endParaRPr lang="en-US"/>
           </a:p>
@@ -4524,6 +4529,6 @@
 
 <file path=docMetadata/LabelInfo.xml><?xml version="1.0" encoding="utf-8"?>
 <clbl:labelList xmlns:clbl="http://schemas.microsoft.com/office/2020/mipLabelMetadata">
-  <clbl:label id="{f42aa342-8706-4288-bd11-ebb85995028c}" enabled="1" method="Standard" siteId="{72f988bf-86f1-41af-91ab-2d7cd011db47}" contentBits="0" removed="0"/>
+  <clbl:label id="{87ba5c36-b7cf-4793-bbc2-bd5b3a9f95ca}" enabled="1" method="Privileged" siteId="{72f988bf-86f1-41af-91ab-2d7cd011db47}" contentBits="0" removed="0"/>
 </clbl:labelList>
 </file>